--- a/ppts/0 - preface.pptx
+++ b/ppts/0 - preface.pptx
@@ -520,7 +520,7 @@
           <a:p>
             <a:fld id="{5EE58819-E3F2-4E6D-9AEE-588E0742387A}" type="datetimeFigureOut">
               <a:rPr lang="en-US" smtClean="0"/>
-              <a:t>5/29/2026</a:t>
+              <a:t>6/1/2026</a:t>
             </a:fld>
             <a:endParaRPr lang="en-US"/>
           </a:p>
@@ -1318,7 +1318,7 @@
           <a:p>
             <a:fld id="{7D7586E9-2048-41F9-AFFB-540BFCF114CE}" type="datetimeFigureOut">
               <a:rPr lang="en-US" smtClean="0"/>
-              <a:t>5/29/2026</a:t>
+              <a:t>6/1/2026</a:t>
             </a:fld>
             <a:endParaRPr lang="en-US"/>
           </a:p>
@@ -1471,7 +1471,7 @@
           <a:p>
             <a:fld id="{7D7586E9-2048-41F9-AFFB-540BFCF114CE}" type="datetimeFigureOut">
               <a:rPr lang="en-US" smtClean="0"/>
-              <a:t>5/29/2026</a:t>
+              <a:t>6/1/2026</a:t>
             </a:fld>
             <a:endParaRPr lang="en-US"/>
           </a:p>
@@ -1914,7 +1914,7 @@
           <a:p>
             <a:fld id="{7D7586E9-2048-41F9-AFFB-540BFCF114CE}" type="datetimeFigureOut">
               <a:rPr lang="en-US" smtClean="0"/>
-              <a:t>5/29/2026</a:t>
+              <a:t>6/1/2026</a:t>
             </a:fld>
             <a:endParaRPr lang="en-US"/>
           </a:p>
@@ -2233,7 +2233,7 @@
           <a:p>
             <a:fld id="{7D7586E9-2048-41F9-AFFB-540BFCF114CE}" type="datetimeFigureOut">
               <a:rPr lang="en-US" smtClean="0"/>
-              <a:t>5/29/2026</a:t>
+              <a:t>6/1/2026</a:t>
             </a:fld>
             <a:endParaRPr lang="en-US"/>
           </a:p>
@@ -2440,7 +2440,7 @@
           <a:p>
             <a:fld id="{7D7586E9-2048-41F9-AFFB-540BFCF114CE}" type="datetimeFigureOut">
               <a:rPr lang="en-US" smtClean="0"/>
-              <a:t>5/29/2026</a:t>
+              <a:t>6/1/2026</a:t>
             </a:fld>
             <a:endParaRPr lang="en-US"/>
           </a:p>
@@ -2759,7 +2759,7 @@
           <a:p>
             <a:fld id="{7D7586E9-2048-41F9-AFFB-540BFCF114CE}" type="datetimeFigureOut">
               <a:rPr lang="en-US" smtClean="0"/>
-              <a:t>5/29/2026</a:t>
+              <a:t>6/1/2026</a:t>
             </a:fld>
             <a:endParaRPr lang="en-US"/>
           </a:p>
@@ -3099,7 +3099,7 @@
           <a:p>
             <a:fld id="{7D7586E9-2048-41F9-AFFB-540BFCF114CE}" type="datetimeFigureOut">
               <a:rPr lang="en-US" smtClean="0"/>
-              <a:t>5/29/2026</a:t>
+              <a:t>6/1/2026</a:t>
             </a:fld>
             <a:endParaRPr lang="en-US"/>
           </a:p>
@@ -3263,7 +3263,7 @@
           <a:p>
             <a:fld id="{7D7586E9-2048-41F9-AFFB-540BFCF114CE}" type="datetimeFigureOut">
               <a:rPr lang="en-US" smtClean="0"/>
-              <a:t>5/29/2026</a:t>
+              <a:t>6/1/2026</a:t>
             </a:fld>
             <a:endParaRPr lang="en-US"/>
           </a:p>
@@ -3540,7 +3540,7 @@
           <a:p>
             <a:fld id="{7D7586E9-2048-41F9-AFFB-540BFCF114CE}" type="datetimeFigureOut">
               <a:rPr lang="en-US" smtClean="0"/>
-              <a:t>5/29/2026</a:t>
+              <a:t>6/1/2026</a:t>
             </a:fld>
             <a:endParaRPr lang="en-US"/>
           </a:p>
@@ -3992,7 +3992,7 @@
           <a:p>
             <a:fld id="{7D7586E9-2048-41F9-AFFB-540BFCF114CE}" type="datetimeFigureOut">
               <a:rPr lang="en-US" smtClean="0"/>
-              <a:t>5/29/2026</a:t>
+              <a:t>6/1/2026</a:t>
             </a:fld>
             <a:endParaRPr lang="en-US"/>
           </a:p>
@@ -4237,7 +4237,7 @@
           <a:p>
             <a:fld id="{7D7586E9-2048-41F9-AFFB-540BFCF114CE}" type="datetimeFigureOut">
               <a:rPr lang="en-US" smtClean="0"/>
-              <a:t>5/29/2026</a:t>
+              <a:t>6/1/2026</a:t>
             </a:fld>
             <a:endParaRPr lang="en-US"/>
           </a:p>
@@ -4798,7 +4798,7 @@
           <a:p>
             <a:fld id="{7D7586E9-2048-41F9-AFFB-540BFCF114CE}" type="datetimeFigureOut">
               <a:rPr lang="en-US" smtClean="0"/>
-              <a:t>5/29/2026</a:t>
+              <a:t>6/1/2026</a:t>
             </a:fld>
             <a:endParaRPr lang="en-US"/>
           </a:p>
@@ -4911,7 +4911,7 @@
           <a:p>
             <a:fld id="{7D7586E9-2048-41F9-AFFB-540BFCF114CE}" type="datetimeFigureOut">
               <a:rPr lang="en-US" smtClean="0"/>
-              <a:t>5/29/2026</a:t>
+              <a:t>6/1/2026</a:t>
             </a:fld>
             <a:endParaRPr lang="en-US"/>
           </a:p>
@@ -5445,7 +5445,7 @@
           <a:p>
             <a:fld id="{7D7586E9-2048-41F9-AFFB-540BFCF114CE}" type="datetimeFigureOut">
               <a:rPr lang="en-US" smtClean="0"/>
-              <a:t>5/29/2026</a:t>
+              <a:t>6/1/2026</a:t>
             </a:fld>
             <a:endParaRPr lang="en-US"/>
           </a:p>
@@ -5759,7 +5759,7 @@
           <a:p>
             <a:fld id="{7D7586E9-2048-41F9-AFFB-540BFCF114CE}" type="datetimeFigureOut">
               <a:rPr lang="en-US" smtClean="0"/>
-              <a:t>5/29/2026</a:t>
+              <a:t>6/1/2026</a:t>
             </a:fld>
             <a:endParaRPr lang="en-US"/>
           </a:p>
@@ -6080,7 +6080,7 @@
           <a:p>
             <a:fld id="{7D7586E9-2048-41F9-AFFB-540BFCF114CE}" type="datetimeFigureOut">
               <a:rPr lang="en-US" smtClean="0"/>
-              <a:t>5/29/2026</a:t>
+              <a:t>6/1/2026</a:t>
             </a:fld>
             <a:endParaRPr lang="en-US"/>
           </a:p>
@@ -6521,7 +6521,7 @@
           <a:p>
             <a:fld id="{7D7586E9-2048-41F9-AFFB-540BFCF114CE}" type="datetimeFigureOut">
               <a:rPr lang="en-US" smtClean="0"/>
-              <a:t>5/29/2026</a:t>
+              <a:t>6/1/2026</a:t>
             </a:fld>
             <a:endParaRPr lang="en-US"/>
           </a:p>
@@ -6962,7 +6962,7 @@
           <a:p>
             <a:fld id="{7D7586E9-2048-41F9-AFFB-540BFCF114CE}" type="datetimeFigureOut">
               <a:rPr lang="en-US" smtClean="0"/>
-              <a:t>5/29/2026</a:t>
+              <a:t>6/1/2026</a:t>
             </a:fld>
             <a:endParaRPr lang="en-US"/>
           </a:p>
@@ -7336,7 +7336,7 @@
           <a:p>
             <a:fld id="{7D7586E9-2048-41F9-AFFB-540BFCF114CE}" type="datetimeFigureOut">
               <a:rPr lang="en-US" smtClean="0"/>
-              <a:t>5/29/2026</a:t>
+              <a:t>6/1/2026</a:t>
             </a:fld>
             <a:endParaRPr lang="en-US"/>
           </a:p>
@@ -7731,7 +7731,7 @@
           <a:p>
             <a:fld id="{7D7586E9-2048-41F9-AFFB-540BFCF114CE}" type="datetimeFigureOut">
               <a:rPr lang="en-US" smtClean="0"/>
-              <a:t>5/29/2026</a:t>
+              <a:t>6/1/2026</a:t>
             </a:fld>
             <a:endParaRPr lang="en-US"/>
           </a:p>
@@ -8135,7 +8135,7 @@
           <a:p>
             <a:fld id="{7D7586E9-2048-41F9-AFFB-540BFCF114CE}" type="datetimeFigureOut">
               <a:rPr lang="en-US" smtClean="0"/>
-              <a:t>5/29/2026</a:t>
+              <a:t>6/1/2026</a:t>
             </a:fld>
             <a:endParaRPr lang="en-US"/>
           </a:p>
@@ -8298,7 +8298,7 @@
           <a:p>
             <a:fld id="{7D7586E9-2048-41F9-AFFB-540BFCF114CE}" type="datetimeFigureOut">
               <a:rPr lang="en-US" smtClean="0"/>
-              <a:t>5/29/2026</a:t>
+              <a:t>6/1/2026</a:t>
             </a:fld>
             <a:endParaRPr lang="en-US"/>
           </a:p>
@@ -8897,7 +8897,7 @@
           <a:p>
             <a:fld id="{7D7586E9-2048-41F9-AFFB-540BFCF114CE}" type="datetimeFigureOut">
               <a:rPr lang="en-US" smtClean="0"/>
-              <a:t>5/29/2026</a:t>
+              <a:t>6/1/2026</a:t>
             </a:fld>
             <a:endParaRPr lang="en-US"/>
           </a:p>
@@ -9013,7 +9013,7 @@
           <a:p>
             <a:fld id="{7D7586E9-2048-41F9-AFFB-540BFCF114CE}" type="datetimeFigureOut">
               <a:rPr lang="en-US" smtClean="0"/>
-              <a:t>5/29/2026</a:t>
+              <a:t>6/1/2026</a:t>
             </a:fld>
             <a:endParaRPr lang="en-US"/>
           </a:p>
@@ -9483,7 +9483,7 @@
           <a:p>
             <a:fld id="{7D7586E9-2048-41F9-AFFB-540BFCF114CE}" type="datetimeFigureOut">
               <a:rPr lang="en-US" smtClean="0"/>
-              <a:t>5/29/2026</a:t>
+              <a:t>6/1/2026</a:t>
             </a:fld>
             <a:endParaRPr lang="en-US"/>
           </a:p>
@@ -9589,7 +9589,7 @@
           <a:p>
             <a:fld id="{7D7586E9-2048-41F9-AFFB-540BFCF114CE}" type="datetimeFigureOut">
               <a:rPr lang="en-US" smtClean="0"/>
-              <a:t>5/29/2026</a:t>
+              <a:t>6/1/2026</a:t>
             </a:fld>
             <a:endParaRPr lang="en-US"/>
           </a:p>
@@ -10077,7 +10077,7 @@
           <a:p>
             <a:fld id="{7D7586E9-2048-41F9-AFFB-540BFCF114CE}" type="datetimeFigureOut">
               <a:rPr lang="en-US" smtClean="0"/>
-              <a:t>5/29/2026</a:t>
+              <a:t>6/1/2026</a:t>
             </a:fld>
             <a:endParaRPr lang="en-US"/>
           </a:p>
@@ -10190,7 +10190,7 @@
           <a:p>
             <a:fld id="{7D7586E9-2048-41F9-AFFB-540BFCF114CE}" type="datetimeFigureOut">
               <a:rPr lang="en-US" smtClean="0"/>
-              <a:t>5/29/2026</a:t>
+              <a:t>6/1/2026</a:t>
             </a:fld>
             <a:endParaRPr lang="en-US"/>
           </a:p>
@@ -10732,7 +10732,7 @@
           <a:p>
             <a:fld id="{7D7586E9-2048-41F9-AFFB-540BFCF114CE}" type="datetimeFigureOut">
               <a:rPr lang="en-US" smtClean="0"/>
-              <a:t>5/29/2026</a:t>
+              <a:t>6/1/2026</a:t>
             </a:fld>
             <a:endParaRPr lang="en-US"/>
           </a:p>
@@ -11148,7 +11148,7 @@
           <a:p>
             <a:fld id="{7D7586E9-2048-41F9-AFFB-540BFCF114CE}" type="datetimeFigureOut">
               <a:rPr lang="en-US" smtClean="0"/>
-              <a:t>5/29/2026</a:t>
+              <a:t>6/1/2026</a:t>
             </a:fld>
             <a:endParaRPr lang="en-US"/>
           </a:p>
@@ -11490,7 +11490,7 @@
           <a:p>
             <a:fld id="{7D7586E9-2048-41F9-AFFB-540BFCF114CE}" type="datetimeFigureOut">
               <a:rPr lang="en-US" smtClean="0"/>
-              <a:t>5/29/2026</a:t>
+              <a:t>6/1/2026</a:t>
             </a:fld>
             <a:endParaRPr lang="en-US"/>
           </a:p>
@@ -12153,7 +12153,7 @@
           <a:p>
             <a:fld id="{7D7586E9-2048-41F9-AFFB-540BFCF114CE}" type="datetimeFigureOut">
               <a:rPr lang="en-US" smtClean="0"/>
-              <a:t>5/29/2026</a:t>
+              <a:t>6/1/2026</a:t>
             </a:fld>
             <a:endParaRPr lang="en-US"/>
           </a:p>
@@ -12517,7 +12517,7 @@
           <a:p>
             <a:fld id="{7D7586E9-2048-41F9-AFFB-540BFCF114CE}" type="datetimeFigureOut">
               <a:rPr lang="en-US" smtClean="0"/>
-              <a:t>5/29/2026</a:t>
+              <a:t>6/1/2026</a:t>
             </a:fld>
             <a:endParaRPr lang="en-US"/>
           </a:p>
@@ -13238,7 +13238,7 @@
           <a:p>
             <a:fld id="{7D7586E9-2048-41F9-AFFB-540BFCF114CE}" type="datetimeFigureOut">
               <a:rPr lang="en-US" smtClean="0"/>
-              <a:t>5/29/2026</a:t>
+              <a:t>6/1/2026</a:t>
             </a:fld>
             <a:endParaRPr lang="en-US"/>
           </a:p>
@@ -13445,7 +13445,7 @@
           <a:p>
             <a:fld id="{7D7586E9-2048-41F9-AFFB-540BFCF114CE}" type="datetimeFigureOut">
               <a:rPr lang="en-US" smtClean="0"/>
-              <a:t>5/29/2026</a:t>
+              <a:t>6/1/2026</a:t>
             </a:fld>
             <a:endParaRPr lang="en-US"/>
           </a:p>
@@ -13741,7 +13741,7 @@
           <a:p>
             <a:fld id="{7D7586E9-2048-41F9-AFFB-540BFCF114CE}" type="datetimeFigureOut">
               <a:rPr lang="en-US" smtClean="0"/>
-              <a:t>5/29/2026</a:t>
+              <a:t>6/1/2026</a:t>
             </a:fld>
             <a:endParaRPr lang="en-US"/>
           </a:p>
@@ -15685,8 +15685,13 @@
           <a:p>
             <a:r>
               <a:rPr lang="en-US" dirty="0"/>
-              <a:t>What you de</a:t>
-            </a:r>
+              <a:t>What you d</a:t>
+            </a:r>
+            <a:r>
+              <a:rPr lang="en-BE" dirty="0"/>
+              <a:t>o</a:t>
+            </a:r>
+            <a:endParaRPr lang="en-US" dirty="0"/>
           </a:p>
           <a:p>
             <a:r>
